--- a/public/fun/pack/pptx/talkpro/발표템플릿프리미엄_16_사업제안_마린화이트.pptx
+++ b/public/fun/pack/pptx/talkpro/발표템플릿프리미엄_16_사업제안_마린화이트.pptx
@@ -115,12 +115,12 @@
   <p:extLst>
     <p:ext uri="{521415D9-36F7-43E2-AB2F-B90AF26B5E84}">
       <p14:sectionLst xmlns:p14="http://schemas.microsoft.com/office/powerpoint/2010/main">
-        <p14:section name="시작" id="{FC2509DF-CDDD-4B71-BA4B-8DF031750D58}">
+        <p14:section name="시작" id="{48F95C9A-CA46-41C6-ADC4-A91F87B385FB}">
           <p14:sldIdLst>
             <p14:sldId id="256"/>
           </p14:sldIdLst>
         </p14:section>
-        <p14:section name="본문" id="{31BDC764-A15F-4A70-85B2-4E0F2EDE1986}">
+        <p14:section name="본문" id="{BE9D0DDB-FF8E-4C63-B20B-ACC780A2CEE0}">
           <p14:sldIdLst>
             <p14:sldId id="257"/>
             <p14:sldId id="258"/>
@@ -131,7 +131,7 @@
             <p14:sldId id="263"/>
           </p14:sldIdLst>
         </p14:section>
-        <p14:section name="마무리" id="{78AEA9E3-0053-40C8-9FAF-9776C5EE269C}">
+        <p14:section name="마무리" id="{EEC1D257-393C-41DD-8969-CCD02BF5B99E}">
           <p14:sldIdLst>
             <p14:sldId id="264"/>
           </p14:sldIdLst>
@@ -1798,7 +1798,7 @@
             </a:lvl1pPr>
           </a:lstStyle>
           <a:p>
-            <a:fld id="{485E2338-344A-4DED-803D-EAFC2E875A97}" type="slidenum">
+            <a:fld id="{82D4944F-86B5-4A96-9E98-74ECAD9F560A}" type="slidenum">
               <a:rPr lang="en-US"/>
               <a:t>‹#›</a:t>
             </a:fld>
@@ -2440,7 +2440,7 @@
             </a:lvl1pPr>
           </a:lstStyle>
           <a:p>
-            <a:fld id="{9F70F243-5E19-4B2A-ADC2-FA3662E748CF}" type="slidenum">
+            <a:fld id="{87F97794-57F5-412C-87EC-9A8934A26447}" type="slidenum">
               <a:rPr lang="en-US"/>
               <a:t>‹#›</a:t>
             </a:fld>
@@ -3120,7 +3120,7 @@
             </a:lvl1pPr>
           </a:lstStyle>
           <a:p>
-            <a:fld id="{85353C82-1B72-458A-B3CE-2C1B3AA4149B}" type="slidenum">
+            <a:fld id="{B3788E4D-AFB5-4EDC-B8F9-5D428058190C}" type="slidenum">
               <a:rPr lang="en-US"/>
               <a:t>‹#›</a:t>
             </a:fld>
@@ -4037,7 +4037,7 @@
           <a:p>
             <a:r>
               <a:rPr lang="ko-KR"/>
-              <a:t>0000. 00. 00</a:t>
+              <a:t>날짜 입력</a:t>
             </a:r>
           </a:p>
         </p:txBody>
@@ -4122,7 +4122,7 @@
           <a:bodyPr/>
           <a:lstStyle/>
           <a:p>
-            <a:fld id="{CA40B8AC-7404-4D4B-9155-D75046239E50}" type="slidenum">
+            <a:fld id="{67670514-3B6F-4042-B8F7-9D49A781ABF1}" type="slidenum">
               <a:rPr lang="en-US"/>
               <a:t>‹#›</a:t>
             </a:fld>
@@ -5220,7 +5220,7 @@
           <a:bodyPr/>
           <a:lstStyle/>
           <a:p>
-            <a:fld id="{4776C80B-9387-4293-875E-58E6D6C52A95}" type="slidenum">
+            <a:fld id="{45B75E17-1829-4B7D-9103-97FA4895C5A8}" type="slidenum">
               <a:rPr lang="en-US"/>
               <a:t>‹#›</a:t>
             </a:fld>
@@ -5308,7 +5308,7 @@
           <a:bodyPr/>
           <a:lstStyle/>
           <a:p>
-            <a:fld id="{62C4BEE1-7BC5-479D-9634-374ABC9BDCA8}" type="slidenum">
+            <a:fld id="{FD9855CA-8F8C-444F-8195-D5FFABBA9BD3}" type="slidenum">
               <a:rPr lang="en-US"/>
               <a:t>‹#›</a:t>
             </a:fld>
@@ -6203,7 +6203,7 @@
           <a:bodyPr/>
           <a:lstStyle/>
           <a:p>
-            <a:fld id="{C4B48788-4DA1-42B1-918D-9F90DB0B72ED}" type="slidenum">
+            <a:fld id="{C7C0CDD8-8ECD-4530-8792-C210D0A3FE92}" type="slidenum">
               <a:rPr lang="en-US"/>
               <a:t>‹#›</a:t>
             </a:fld>
@@ -6805,7 +6805,7 @@
           <a:bodyPr/>
           <a:lstStyle/>
           <a:p>
-            <a:fld id="{BEB4FD86-68A5-4F8F-997B-F55252349916}" type="slidenum">
+            <a:fld id="{EDA93932-2DC0-4A71-934A-F996A631D351}" type="slidenum">
               <a:rPr lang="en-US"/>
               <a:t>‹#›</a:t>
             </a:fld>
@@ -6988,7 +6988,7 @@
           <a:bodyPr/>
           <a:lstStyle/>
           <a:p>
-            <a:fld id="{88B7D01A-BF8A-490A-8012-B61CA090BFFC}" type="slidenum">
+            <a:fld id="{48A7A4E2-123B-4D8D-9917-2AAB00491823}" type="slidenum">
               <a:rPr lang="en-US"/>
               <a:t>‹#›</a:t>
             </a:fld>
@@ -8052,7 +8052,7 @@
           <a:bodyPr/>
           <a:lstStyle/>
           <a:p>
-            <a:fld id="{B2FFBBF2-C994-411E-BFBD-7B28128540C6}" type="slidenum">
+            <a:fld id="{B14F7CAD-A2DB-4074-8107-23F39B3B0D52}" type="slidenum">
               <a:rPr lang="en-US"/>
               <a:t>‹#›</a:t>
             </a:fld>
